--- a/exports/pptx/lessons/primary-module-08-yoga/day-02-tree.pptx
+++ b/exports/pptx/lessons/primary-module-08-yoga/day-02-tree.pptx
@@ -16,9 +16,11 @@
     <p:sldId id="264" r:id="rId10"/>
     <p:sldId id="265" r:id="rId11"/>
     <p:sldId id="266" r:id="rId12"/>
+    <p:sldId id="267" r:id="rId13"/>
+    <p:sldId id="268" r:id="rId14"/>
   </p:sldIdLst>
   <p:notesMasterIdLst>
-    <p:notesMasterId r:id="rId13"/>
+    <p:notesMasterId r:id="rId15"/>
   </p:notesMasterIdLst>
   <p:sldSz cx="9144000" cy="5143500"/>
   <p:notesSz cx="5143500" cy="9144000"/>
@@ -712,6 +714,182 @@
             <a:fld id="{F7021451-1387-4CA6-816F-3879F97B5CBC}" type="slidenum">
               <a:rPr lang="en-US"/>
               <a:t>11</a:t>
+            </a:fld>
+            <a:endParaRPr lang="en-US"/>
+          </a:p>
+        </p:txBody>
+      </p:sp>
+    </p:spTree>
+    <p:extLst>
+      <p:ext uri="{BB962C8B-B14F-4D97-AF65-F5344CB8AC3E}">
+        <p14:creationId xmlns:p14="http://schemas.microsoft.com/office/powerpoint/2010/main" val="1024086991"/>
+      </p:ext>
+    </p:extLst>
+  </p:cSld>
+  <p:clrMapOvr>
+    <a:masterClrMapping/>
+  </p:clrMapOvr>
+</p:notes>
+</file>
+
+<file path=ppt/notesSlides/notesSlide12.xml><?xml version="1.0" encoding="utf-8"?>
+<p:notes xmlns:a="http://schemas.openxmlformats.org/drawingml/2006/main" xmlns:r="http://schemas.openxmlformats.org/officeDocument/2006/relationships" xmlns:p="http://schemas.openxmlformats.org/presentationml/2006/main">
+  <p:cSld>
+    <p:spTree>
+      <p:nvGrpSpPr>
+        <p:cNvPr id="1" name=""/>
+        <p:cNvGrpSpPr/>
+        <p:nvPr/>
+      </p:nvGrpSpPr>
+      <p:grpSpPr>
+        <a:xfrm>
+          <a:off x="0" y="0"/>
+          <a:ext cx="0" cy="0"/>
+          <a:chOff x="0" y="0"/>
+          <a:chExt cx="0" cy="0"/>
+        </a:xfrm>
+      </p:grpSpPr>
+      <p:sp>
+        <p:nvSpPr>
+          <p:cNvPr id="2" name="Slide Image Placeholder 1"/>
+          <p:cNvSpPr>
+            <a:spLocks noGrp="1" noRot="1" noChangeAspect="1"/>
+          </p:cNvSpPr>
+          <p:nvPr>
+            <p:ph type="sldImg"/>
+          </p:nvPr>
+        </p:nvSpPr>
+        <p:spPr/>
+      </p:sp>
+      <p:sp>
+        <p:nvSpPr>
+          <p:cNvPr id="3" name="Notes Placeholder 2"/>
+          <p:cNvSpPr>
+            <a:spLocks noGrp="1"/>
+          </p:cNvSpPr>
+          <p:nvPr>
+            <p:ph type="body" idx="1"/>
+          </p:nvPr>
+        </p:nvSpPr>
+        <p:spPr/>
+        <p:txBody>
+          <a:bodyPr/>
+          <a:lstStyle/>
+          <a:p>
+            <a:r>
+              <a:rPr lang="en-US" dirty="0"/>
+              <a:t/>
+            </a:r>
+            <a:endParaRPr lang="en-US" dirty="0"/>
+          </a:p>
+        </p:txBody>
+      </p:sp>
+      <p:sp>
+        <p:nvSpPr>
+          <p:cNvPr id="4" name="Slide Number Placeholder 3"/>
+          <p:cNvSpPr>
+            <a:spLocks noGrp="1"/>
+          </p:cNvSpPr>
+          <p:nvPr>
+            <p:ph type="sldNum" sz="quarter" idx="10"/>
+          </p:nvPr>
+        </p:nvSpPr>
+        <p:spPr/>
+        <p:txBody>
+          <a:bodyPr/>
+          <a:lstStyle/>
+          <a:p>
+            <a:fld id="{F7021451-1387-4CA6-816F-3879F97B5CBC}" type="slidenum">
+              <a:rPr lang="en-US"/>
+              <a:t>12</a:t>
+            </a:fld>
+            <a:endParaRPr lang="en-US"/>
+          </a:p>
+        </p:txBody>
+      </p:sp>
+    </p:spTree>
+    <p:extLst>
+      <p:ext uri="{BB962C8B-B14F-4D97-AF65-F5344CB8AC3E}">
+        <p14:creationId xmlns:p14="http://schemas.microsoft.com/office/powerpoint/2010/main" val="1024086991"/>
+      </p:ext>
+    </p:extLst>
+  </p:cSld>
+  <p:clrMapOvr>
+    <a:masterClrMapping/>
+  </p:clrMapOvr>
+</p:notes>
+</file>
+
+<file path=ppt/notesSlides/notesSlide13.xml><?xml version="1.0" encoding="utf-8"?>
+<p:notes xmlns:a="http://schemas.openxmlformats.org/drawingml/2006/main" xmlns:r="http://schemas.openxmlformats.org/officeDocument/2006/relationships" xmlns:p="http://schemas.openxmlformats.org/presentationml/2006/main">
+  <p:cSld>
+    <p:spTree>
+      <p:nvGrpSpPr>
+        <p:cNvPr id="1" name=""/>
+        <p:cNvGrpSpPr/>
+        <p:nvPr/>
+      </p:nvGrpSpPr>
+      <p:grpSpPr>
+        <a:xfrm>
+          <a:off x="0" y="0"/>
+          <a:ext cx="0" cy="0"/>
+          <a:chOff x="0" y="0"/>
+          <a:chExt cx="0" cy="0"/>
+        </a:xfrm>
+      </p:grpSpPr>
+      <p:sp>
+        <p:nvSpPr>
+          <p:cNvPr id="2" name="Slide Image Placeholder 1"/>
+          <p:cNvSpPr>
+            <a:spLocks noGrp="1" noRot="1" noChangeAspect="1"/>
+          </p:cNvSpPr>
+          <p:nvPr>
+            <p:ph type="sldImg"/>
+          </p:nvPr>
+        </p:nvSpPr>
+        <p:spPr/>
+      </p:sp>
+      <p:sp>
+        <p:nvSpPr>
+          <p:cNvPr id="3" name="Notes Placeholder 2"/>
+          <p:cNvSpPr>
+            <a:spLocks noGrp="1"/>
+          </p:cNvSpPr>
+          <p:nvPr>
+            <p:ph type="body" idx="1"/>
+          </p:nvPr>
+        </p:nvSpPr>
+        <p:spPr/>
+        <p:txBody>
+          <a:bodyPr/>
+          <a:lstStyle/>
+          <a:p>
+            <a:r>
+              <a:rPr lang="en-US" dirty="0"/>
+              <a:t/>
+            </a:r>
+            <a:endParaRPr lang="en-US" dirty="0"/>
+          </a:p>
+        </p:txBody>
+      </p:sp>
+      <p:sp>
+        <p:nvSpPr>
+          <p:cNvPr id="4" name="Slide Number Placeholder 3"/>
+          <p:cNvSpPr>
+            <a:spLocks noGrp="1"/>
+          </p:cNvSpPr>
+          <p:nvPr>
+            <p:ph type="sldNum" sz="quarter" idx="10"/>
+          </p:nvPr>
+        </p:nvSpPr>
+        <p:spPr/>
+        <p:txBody>
+          <a:bodyPr/>
+          <a:lstStyle/>
+          <a:p>
+            <a:fld id="{F7021451-1387-4CA6-816F-3879F97B5CBC}" type="slidenum">
+              <a:rPr lang="en-US"/>
+              <a:t>13</a:t>
             </a:fld>
             <a:endParaRPr lang="en-US"/>
           </a:p>
@@ -1965,102 +2143,6 @@
         </p:nvSpPr>
         <p:spPr>
           <a:xfrm>
-            <a:off x="406301" y="1223963"/>
-            <a:ext cx="8498026" cy="274290"/>
-          </a:xfrm>
-          <a:prstGeom prst="rect">
-            <a:avLst/>
-          </a:prstGeom>
-          <a:noFill/>
-          <a:ln/>
-        </p:spPr>
-        <p:txBody>
-          <a:bodyPr wrap="square" lIns="0" tIns="0" rIns="0" bIns="0" rtlCol="0" anchor="t"/>
-          <a:lstStyle/>
-          <a:p>
-            <a:pPr algn="l" indent="0" marL="0">
-              <a:lnSpc>
-                <a:spcPts val="2160"/>
-              </a:lnSpc>
-              <a:spcBef>
-                <a:spcPts val="600"/>
-              </a:spcBef>
-              <a:spcAft>
-                <a:spcPts val="800"/>
-              </a:spcAft>
-              <a:buNone/>
-            </a:pPr>
-            <a:r>
-              <a:rPr lang="en-US" sz="1800" b="1" dirty="0">
-                <a:solidFill>
-                  <a:srgbClr val="E07A5F"/>
-                </a:solidFill>
-                <a:latin typeface="Georgia" pitchFamily="34" charset="0"/>
-                <a:ea typeface="Georgia" pitchFamily="34" charset="-122"/>
-                <a:cs typeface="Georgia" pitchFamily="34" charset="-120"/>
-              </a:rPr>
-              <a:t>Goal</a:t>
-            </a:r>
-            <a:endParaRPr lang="en-US" sz="1800" dirty="0"/>
-          </a:p>
-        </p:txBody>
-      </p:sp>
-      <p:sp>
-        <p:nvSpPr>
-          <p:cNvPr id="6" name="Text 4"/>
-          <p:cNvSpPr/>
-          <p:nvPr/>
-        </p:nvSpPr>
-        <p:spPr>
-          <a:xfrm>
-            <a:off x="406301" y="1637854"/>
-            <a:ext cx="8498026" cy="213271"/>
-          </a:xfrm>
-          <a:prstGeom prst="rect">
-            <a:avLst/>
-          </a:prstGeom>
-          <a:noFill/>
-          <a:ln/>
-        </p:spPr>
-        <p:txBody>
-          <a:bodyPr wrap="square" lIns="0" tIns="0" rIns="0" bIns="0" rtlCol="0" anchor="t"/>
-          <a:lstStyle/>
-          <a:p>
-            <a:pPr algn="l" indent="0" marL="0">
-              <a:lnSpc>
-                <a:spcPts val="1680"/>
-              </a:lnSpc>
-              <a:spcBef>
-                <a:spcPts val="300"/>
-              </a:spcBef>
-              <a:spcAft>
-                <a:spcPts val="300"/>
-              </a:spcAft>
-              <a:buNone/>
-            </a:pPr>
-            <a:r>
-              <a:rPr lang="en-US" sz="1200" dirty="0">
-                <a:solidFill>
-                  <a:srgbClr val="2C2C2C"/>
-                </a:solidFill>
-                <a:latin typeface="Verdana" pitchFamily="34" charset="0"/>
-                <a:ea typeface="Verdana" pitchFamily="34" charset="-122"/>
-                <a:cs typeface="Verdana" pitchFamily="34" charset="-120"/>
-              </a:rPr>
-              <a:t>Children try the tree pose. Wobble is welcome.</a:t>
-            </a:r>
-            <a:endParaRPr lang="en-US" sz="1200" dirty="0"/>
-          </a:p>
-        </p:txBody>
-      </p:sp>
-      <p:sp>
-        <p:nvSpPr>
-          <p:cNvPr id="7" name="Text 5"/>
-          <p:cNvSpPr/>
-          <p:nvPr/>
-        </p:nvSpPr>
-        <p:spPr>
-          <a:xfrm>
             <a:off x="406301" y="4434929"/>
             <a:ext cx="8498026" cy="213271"/>
           </a:xfrm>
@@ -2205,7 +2287,7 @@
                 <a:ea typeface="Georgia" pitchFamily="34" charset="-122"/>
                 <a:cs typeface="Georgia" pitchFamily="34" charset="-120"/>
               </a:rPr>
-              <a:t>Differentiation</a:t>
+              <a:t>Close (3 min)</a:t>
             </a:r>
             <a:endParaRPr lang="en-US" sz="1800" dirty="0"/>
           </a:p>
@@ -2219,8 +2301,8 @@
         </p:nvSpPr>
         <p:spPr>
           <a:xfrm>
-            <a:off x="634901" y="883593"/>
-            <a:ext cx="8102798" cy="731341"/>
+            <a:off x="406301" y="870942"/>
+            <a:ext cx="8498026" cy="213271"/>
           </a:xfrm>
           <a:prstGeom prst="rect">
             <a:avLst/>
@@ -2232,18 +2314,20 @@
           <a:bodyPr wrap="square" lIns="0" tIns="0" rIns="0" bIns="0" rtlCol="0" anchor="t"/>
           <a:lstStyle/>
           <a:p>
-            <a:pPr algn="l" marL="342900" indent="-342900">
-              <a:lnSpc>
-                <a:spcPts val="1620"/>
-              </a:lnSpc>
-              <a:spcAft>
-                <a:spcPts val="300"/>
-              </a:spcAft>
-              <a:buSzPct val="100000"/>
-              <a:buChar char="•"/>
-            </a:pPr>
-            <a:r>
-              <a:rPr lang="en-US" sz="1200" b="1" dirty="0">
+            <a:pPr algn="l" indent="0" marL="0">
+              <a:lnSpc>
+                <a:spcPts val="1680"/>
+              </a:lnSpc>
+              <a:spcBef>
+                <a:spcPts val="300"/>
+              </a:spcBef>
+              <a:spcAft>
+                <a:spcPts val="300"/>
+              </a:spcAft>
+              <a:buNone/>
+            </a:pPr>
+            <a:r>
+              <a:rPr lang="en-US" sz="1200" dirty="0">
                 <a:solidFill>
                   <a:srgbClr val="2C2C2C"/>
                 </a:solidFill>
@@ -2251,71 +2335,7 @@
                 <a:ea typeface="Verdana" pitchFamily="34" charset="-122"/>
                 <a:cs typeface="Verdana" pitchFamily="34" charset="-120"/>
               </a:rPr>
-              <a:t>Tier up:</a:t>
-            </a:r>
-            <a:pPr algn="l" indent="0" marL="0">
-              <a:lnSpc>
-                <a:spcPts val="1620"/>
-              </a:lnSpc>
-              <a:spcAft>
-                <a:spcPts val="300"/>
-              </a:spcAft>
-              <a:buNone/>
-            </a:pPr>
-            <a:r>
-              <a:rPr lang="en-US" sz="1200" dirty="0">
-                <a:solidFill>
-                  <a:srgbClr val="2C2C2C"/>
-                </a:solidFill>
-                <a:latin typeface="Verdana" pitchFamily="34" charset="0"/>
-                <a:ea typeface="Verdana" pitchFamily="34" charset="-122"/>
-                <a:cs typeface="Verdana" pitchFamily="34" charset="-120"/>
-              </a:rPr>
-              <a:t> Hold for 30 sec. Try with eyes closed (briefly).</a:t>
-            </a:r>
-            <a:endParaRPr lang="en-US" sz="1200" dirty="0"/>
-          </a:p>
-          <a:p>
-            <a:pPr algn="l" marL="342900" indent="-342900">
-              <a:lnSpc>
-                <a:spcPts val="1620"/>
-              </a:lnSpc>
-              <a:spcAft>
-                <a:spcPts val="300"/>
-              </a:spcAft>
-              <a:buSzPct val="100000"/>
-              <a:buChar char="•"/>
-            </a:pPr>
-            <a:r>
-              <a:rPr lang="en-US" sz="1200" b="1" dirty="0">
-                <a:solidFill>
-                  <a:srgbClr val="2C2C2C"/>
-                </a:solidFill>
-                <a:latin typeface="Verdana" pitchFamily="34" charset="0"/>
-                <a:ea typeface="Verdana" pitchFamily="34" charset="-122"/>
-                <a:cs typeface="Verdana" pitchFamily="34" charset="-120"/>
-              </a:rPr>
-              <a:t>Tier down:</a:t>
-            </a:r>
-            <a:pPr algn="l" indent="0" marL="0">
-              <a:lnSpc>
-                <a:spcPts val="1620"/>
-              </a:lnSpc>
-              <a:spcAft>
-                <a:spcPts val="300"/>
-              </a:spcAft>
-              <a:buNone/>
-            </a:pPr>
-            <a:r>
-              <a:rPr lang="en-US" sz="1200" dirty="0">
-                <a:solidFill>
-                  <a:srgbClr val="2C2C2C"/>
-                </a:solidFill>
-                <a:latin typeface="Verdana" pitchFamily="34" charset="0"/>
-                <a:ea typeface="Verdana" pitchFamily="34" charset="-122"/>
-                <a:cs typeface="Verdana" pitchFamily="34" charset="-120"/>
-              </a:rPr>
-              <a:t> Use a wall behind you for support. Or rest the lifted foot on the floor next to the standing foot.</a:t>
+              <a:t>Tāḍāsana. Namaste.</a:t>
             </a:r>
             <a:endParaRPr lang="en-US" sz="1200" dirty="0"/>
           </a:p>
@@ -2473,7 +2493,7 @@
                 <a:ea typeface="Georgia" pitchFamily="34" charset="-122"/>
                 <a:cs typeface="Georgia" pitchFamily="34" charset="-120"/>
               </a:rPr>
-              <a:t>Teacher's quick notes</a:t>
+              <a:t>Homework</a:t>
             </a:r>
             <a:endParaRPr lang="en-US" sz="1800" dirty="0"/>
           </a:p>
@@ -2487,8 +2507,8 @@
         </p:nvSpPr>
         <p:spPr>
           <a:xfrm>
-            <a:off x="406301" y="870942"/>
-            <a:ext cx="8498026" cy="426541"/>
+            <a:off x="634901" y="883593"/>
+            <a:ext cx="8102798" cy="281880"/>
           </a:xfrm>
           <a:prstGeom prst="rect">
             <a:avLst/>
@@ -2500,17 +2520,15 @@
           <a:bodyPr wrap="square" lIns="0" tIns="0" rIns="0" bIns="0" rtlCol="0" anchor="t"/>
           <a:lstStyle/>
           <a:p>
-            <a:pPr algn="l" indent="0" marL="0">
-              <a:lnSpc>
-                <a:spcPts val="1680"/>
-              </a:lnSpc>
-              <a:spcBef>
-                <a:spcPts val="300"/>
-              </a:spcBef>
-              <a:spcAft>
-                <a:spcPts val="300"/>
-              </a:spcAft>
-              <a:buNone/>
+            <a:pPr algn="l" marL="342900" indent="-342900">
+              <a:lnSpc>
+                <a:spcPts val="1620"/>
+              </a:lnSpc>
+              <a:spcAft>
+                <a:spcPts val="300"/>
+              </a:spcAft>
+              <a:buSzPct val="100000"/>
+              <a:buChar char="•"/>
             </a:pPr>
             <a:r>
               <a:rPr lang="en-US" sz="1200" dirty="0">
@@ -2521,8 +2539,33 @@
                 <a:ea typeface="Verdana" pitchFamily="34" charset="-122"/>
                 <a:cs typeface="Verdana" pitchFamily="34" charset="-120"/>
               </a:rPr>
-              <a:t>– THE knee safety cue is critical. Foot above OR below the knee. NEVER ON the side of the knee. – Wobble is information. Falling is information. Both are fine. The skill is </a:t>
-            </a:r>
+              <a:t>Stand on one leg at home for 10 seconds. Switch. Repeat. (Brush teeth while doing it!)</a:t>
+            </a:r>
+            <a:endParaRPr lang="en-US" sz="1200" dirty="0"/>
+          </a:p>
+        </p:txBody>
+      </p:sp>
+      <p:sp>
+        <p:nvSpPr>
+          <p:cNvPr id="5" name="Text 3"/>
+          <p:cNvSpPr/>
+          <p:nvPr/>
+        </p:nvSpPr>
+        <p:spPr>
+          <a:xfrm>
+            <a:off x="406301" y="4434929"/>
+            <a:ext cx="8498026" cy="213271"/>
+          </a:xfrm>
+          <a:prstGeom prst="rect">
+            <a:avLst/>
+          </a:prstGeom>
+          <a:noFill/>
+          <a:ln/>
+        </p:spPr>
+        <p:txBody>
+          <a:bodyPr wrap="square" lIns="0" tIns="0" rIns="0" bIns="0" rtlCol="0" anchor="t"/>
+          <a:lstStyle/>
+          <a:p>
             <a:pPr algn="l" indent="0" marL="0">
               <a:lnSpc>
                 <a:spcPts val="1680"/>
@@ -2536,7 +2579,7 @@
               <a:buNone/>
             </a:pPr>
             <a:r>
-              <a:rPr lang="en-US" sz="1200" i="1" dirty="0">
+              <a:rPr lang="en-US" sz="1200" dirty="0">
                 <a:solidFill>
                   <a:srgbClr val="2C2C2C"/>
                 </a:solidFill>
@@ -2544,15 +2587,480 @@
                 <a:ea typeface="Verdana" pitchFamily="34" charset="-122"/>
                 <a:cs typeface="Verdana" pitchFamily="34" charset="-120"/>
               </a:rPr>
+              <a:t>Primary ·  · IKS Curriculum</a:t>
+            </a:r>
+            <a:endParaRPr lang="en-US" sz="1200" dirty="0"/>
+          </a:p>
+        </p:txBody>
+      </p:sp>
+    </p:spTree>
+  </p:cSld>
+  <p:clrMapOvr>
+    <a:masterClrMapping/>
+  </p:clrMapOvr>
+</p:sld>
+</file>
+
+<file path=ppt/slides/slide12.xml><?xml version="1.0" encoding="utf-8"?>
+<p:sld xmlns:a="http://schemas.openxmlformats.org/drawingml/2006/main" xmlns:r="http://schemas.openxmlformats.org/officeDocument/2006/relationships" xmlns:p="http://schemas.openxmlformats.org/presentationml/2006/main">
+  <p:cSld name="Slide 12">
+    <p:bg>
+      <p:bgPr>
+        <a:solidFill>
+          <a:srgbClr val="FAF7F2"/>
+        </a:solidFill>
+      </p:bgPr>
+    </p:bg>
+    <p:spTree>
+      <p:nvGrpSpPr>
+        <p:cNvPr id="1" name=""/>
+        <p:cNvGrpSpPr/>
+        <p:nvPr/>
+      </p:nvGrpSpPr>
+      <p:grpSpPr>
+        <a:xfrm>
+          <a:off x="0" y="0"/>
+          <a:ext cx="0" cy="0"/>
+          <a:chOff x="0" y="0"/>
+          <a:chExt cx="0" cy="0"/>
+        </a:xfrm>
+      </p:grpSpPr>
+      <p:sp>
+        <p:nvSpPr>
+          <p:cNvPr id="2" name="Text 0"/>
+          <p:cNvSpPr/>
+          <p:nvPr/>
+        </p:nvSpPr>
+        <p:spPr>
+          <a:xfrm>
+            <a:off x="0" y="0"/>
+            <a:ext cx="9144000" cy="101501"/>
+          </a:xfrm>
+          <a:prstGeom prst="rect">
+            <a:avLst/>
+          </a:prstGeom>
+          <a:solidFill>
+            <a:srgbClr val="87A96B"/>
+          </a:solidFill>
+          <a:ln/>
+        </p:spPr>
+        <p:txBody>
+          <a:bodyPr wrap="square" rtlCol="0" anchor="ctr"/>
+          <a:lstStyle/>
+          <a:p>
+            <a:pPr indent="0" marL="0">
+              <a:buNone/>
+            </a:pPr>
+            <a:endParaRPr lang="en-US" dirty="0"/>
+          </a:p>
+        </p:txBody>
+      </p:sp>
+      <p:sp>
+        <p:nvSpPr>
+          <p:cNvPr id="3" name="Text 1"/>
+          <p:cNvSpPr/>
+          <p:nvPr/>
+        </p:nvSpPr>
+        <p:spPr>
+          <a:xfrm>
+            <a:off x="406301" y="457051"/>
+            <a:ext cx="8498026" cy="274290"/>
+          </a:xfrm>
+          <a:prstGeom prst="rect">
+            <a:avLst/>
+          </a:prstGeom>
+          <a:noFill/>
+          <a:ln/>
+        </p:spPr>
+        <p:txBody>
+          <a:bodyPr wrap="square" lIns="0" tIns="0" rIns="0" bIns="0" rtlCol="0" anchor="t"/>
+          <a:lstStyle/>
+          <a:p>
+            <a:pPr algn="l" indent="0" marL="0">
+              <a:lnSpc>
+                <a:spcPts val="2160"/>
+              </a:lnSpc>
+              <a:spcBef>
+                <a:spcPts val="600"/>
+              </a:spcBef>
+              <a:spcAft>
+                <a:spcPts val="800"/>
+              </a:spcAft>
+              <a:buNone/>
+            </a:pPr>
+            <a:r>
+              <a:rPr lang="en-US" sz="1800" b="1" dirty="0">
+                <a:solidFill>
+                  <a:srgbClr val="E07A5F"/>
+                </a:solidFill>
+                <a:latin typeface="Georgia" pitchFamily="34" charset="0"/>
+                <a:ea typeface="Georgia" pitchFamily="34" charset="-122"/>
+                <a:cs typeface="Georgia" pitchFamily="34" charset="-120"/>
+              </a:rPr>
+              <a:t>Differentiation</a:t>
+            </a:r>
+            <a:endParaRPr lang="en-US" sz="1800" dirty="0"/>
+          </a:p>
+        </p:txBody>
+      </p:sp>
+      <p:sp>
+        <p:nvSpPr>
+          <p:cNvPr id="4" name="Text 2"/>
+          <p:cNvSpPr/>
+          <p:nvPr/>
+        </p:nvSpPr>
+        <p:spPr>
+          <a:xfrm>
+            <a:off x="634901" y="883593"/>
+            <a:ext cx="8102798" cy="731341"/>
+          </a:xfrm>
+          <a:prstGeom prst="rect">
+            <a:avLst/>
+          </a:prstGeom>
+          <a:noFill/>
+          <a:ln/>
+        </p:spPr>
+        <p:txBody>
+          <a:bodyPr wrap="square" lIns="0" tIns="0" rIns="0" bIns="0" rtlCol="0" anchor="t"/>
+          <a:lstStyle/>
+          <a:p>
+            <a:pPr algn="l" marL="342900" indent="-342900">
+              <a:lnSpc>
+                <a:spcPts val="1620"/>
+              </a:lnSpc>
+              <a:spcAft>
+                <a:spcPts val="300"/>
+              </a:spcAft>
+              <a:buSzPct val="100000"/>
+              <a:buChar char="•"/>
+            </a:pPr>
+            <a:r>
+              <a:rPr lang="en-US" sz="1200" b="1" dirty="0">
+                <a:solidFill>
+                  <a:srgbClr val="2C2C2C"/>
+                </a:solidFill>
+                <a:latin typeface="Verdana" pitchFamily="34" charset="0"/>
+                <a:ea typeface="Verdana" pitchFamily="34" charset="-122"/>
+                <a:cs typeface="Verdana" pitchFamily="34" charset="-120"/>
+              </a:rPr>
+              <a:t>Tier up:</a:t>
+            </a:r>
+            <a:pPr algn="l" indent="0" marL="0">
+              <a:lnSpc>
+                <a:spcPts val="1620"/>
+              </a:lnSpc>
+              <a:spcAft>
+                <a:spcPts val="300"/>
+              </a:spcAft>
+              <a:buNone/>
+            </a:pPr>
+            <a:r>
+              <a:rPr lang="en-US" sz="1200" dirty="0">
+                <a:solidFill>
+                  <a:srgbClr val="2C2C2C"/>
+                </a:solidFill>
+                <a:latin typeface="Verdana" pitchFamily="34" charset="0"/>
+                <a:ea typeface="Verdana" pitchFamily="34" charset="-122"/>
+                <a:cs typeface="Verdana" pitchFamily="34" charset="-120"/>
+              </a:rPr>
+              <a:t> Hold for 30 sec. Try with eyes closed (briefly).</a:t>
+            </a:r>
+            <a:endParaRPr lang="en-US" sz="1200" dirty="0"/>
+          </a:p>
+          <a:p>
+            <a:pPr algn="l" marL="342900" indent="-342900">
+              <a:lnSpc>
+                <a:spcPts val="1620"/>
+              </a:lnSpc>
+              <a:spcAft>
+                <a:spcPts val="300"/>
+              </a:spcAft>
+              <a:buSzPct val="100000"/>
+              <a:buChar char="•"/>
+            </a:pPr>
+            <a:r>
+              <a:rPr lang="en-US" sz="1200" b="1" dirty="0">
+                <a:solidFill>
+                  <a:srgbClr val="2C2C2C"/>
+                </a:solidFill>
+                <a:latin typeface="Verdana" pitchFamily="34" charset="0"/>
+                <a:ea typeface="Verdana" pitchFamily="34" charset="-122"/>
+                <a:cs typeface="Verdana" pitchFamily="34" charset="-120"/>
+              </a:rPr>
+              <a:t>Tier down:</a:t>
+            </a:r>
+            <a:pPr algn="l" indent="0" marL="0">
+              <a:lnSpc>
+                <a:spcPts val="1620"/>
+              </a:lnSpc>
+              <a:spcAft>
+                <a:spcPts val="300"/>
+              </a:spcAft>
+              <a:buNone/>
+            </a:pPr>
+            <a:r>
+              <a:rPr lang="en-US" sz="1200" dirty="0">
+                <a:solidFill>
+                  <a:srgbClr val="2C2C2C"/>
+                </a:solidFill>
+                <a:latin typeface="Verdana" pitchFamily="34" charset="0"/>
+                <a:ea typeface="Verdana" pitchFamily="34" charset="-122"/>
+                <a:cs typeface="Verdana" pitchFamily="34" charset="-120"/>
+              </a:rPr>
+              <a:t> Use a wall behind you for support. Or rest the lifted foot on the floor next to the standing foot.</a:t>
+            </a:r>
+            <a:endParaRPr lang="en-US" sz="1200" dirty="0"/>
+          </a:p>
+        </p:txBody>
+      </p:sp>
+      <p:sp>
+        <p:nvSpPr>
+          <p:cNvPr id="5" name="Text 3"/>
+          <p:cNvSpPr/>
+          <p:nvPr/>
+        </p:nvSpPr>
+        <p:spPr>
+          <a:xfrm>
+            <a:off x="406301" y="4434929"/>
+            <a:ext cx="8498026" cy="213271"/>
+          </a:xfrm>
+          <a:prstGeom prst="rect">
+            <a:avLst/>
+          </a:prstGeom>
+          <a:noFill/>
+          <a:ln/>
+        </p:spPr>
+        <p:txBody>
+          <a:bodyPr wrap="square" lIns="0" tIns="0" rIns="0" bIns="0" rtlCol="0" anchor="t"/>
+          <a:lstStyle/>
+          <a:p>
+            <a:pPr algn="l" indent="0" marL="0">
+              <a:lnSpc>
+                <a:spcPts val="1680"/>
+              </a:lnSpc>
+              <a:spcBef>
+                <a:spcPts val="300"/>
+              </a:spcBef>
+              <a:spcAft>
+                <a:spcPts val="300"/>
+              </a:spcAft>
+              <a:buNone/>
+            </a:pPr>
+            <a:r>
+              <a:rPr lang="en-US" sz="1200" dirty="0">
+                <a:solidFill>
+                  <a:srgbClr val="2C2C2C"/>
+                </a:solidFill>
+                <a:latin typeface="Verdana" pitchFamily="34" charset="0"/>
+                <a:ea typeface="Verdana" pitchFamily="34" charset="-122"/>
+                <a:cs typeface="Verdana" pitchFamily="34" charset="-120"/>
+              </a:rPr>
+              <a:t>Primary ·  · IKS Curriculum</a:t>
+            </a:r>
+            <a:endParaRPr lang="en-US" sz="1200" dirty="0"/>
+          </a:p>
+        </p:txBody>
+      </p:sp>
+    </p:spTree>
+  </p:cSld>
+  <p:clrMapOvr>
+    <a:masterClrMapping/>
+  </p:clrMapOvr>
+</p:sld>
+</file>
+
+<file path=ppt/slides/slide13.xml><?xml version="1.0" encoding="utf-8"?>
+<p:sld xmlns:a="http://schemas.openxmlformats.org/drawingml/2006/main" xmlns:r="http://schemas.openxmlformats.org/officeDocument/2006/relationships" xmlns:p="http://schemas.openxmlformats.org/presentationml/2006/main">
+  <p:cSld name="Slide 13">
+    <p:bg>
+      <p:bgPr>
+        <a:solidFill>
+          <a:srgbClr val="FAF7F2"/>
+        </a:solidFill>
+      </p:bgPr>
+    </p:bg>
+    <p:spTree>
+      <p:nvGrpSpPr>
+        <p:cNvPr id="1" name=""/>
+        <p:cNvGrpSpPr/>
+        <p:nvPr/>
+      </p:nvGrpSpPr>
+      <p:grpSpPr>
+        <a:xfrm>
+          <a:off x="0" y="0"/>
+          <a:ext cx="0" cy="0"/>
+          <a:chOff x="0" y="0"/>
+          <a:chExt cx="0" cy="0"/>
+        </a:xfrm>
+      </p:grpSpPr>
+      <p:sp>
+        <p:nvSpPr>
+          <p:cNvPr id="2" name="Text 0"/>
+          <p:cNvSpPr/>
+          <p:nvPr/>
+        </p:nvSpPr>
+        <p:spPr>
+          <a:xfrm>
+            <a:off x="0" y="0"/>
+            <a:ext cx="9144000" cy="101501"/>
+          </a:xfrm>
+          <a:prstGeom prst="rect">
+            <a:avLst/>
+          </a:prstGeom>
+          <a:solidFill>
+            <a:srgbClr val="87A96B"/>
+          </a:solidFill>
+          <a:ln/>
+        </p:spPr>
+        <p:txBody>
+          <a:bodyPr wrap="square" rtlCol="0" anchor="ctr"/>
+          <a:lstStyle/>
+          <a:p>
+            <a:pPr indent="0" marL="0">
+              <a:buNone/>
+            </a:pPr>
+            <a:endParaRPr lang="en-US" dirty="0"/>
+          </a:p>
+        </p:txBody>
+      </p:sp>
+      <p:sp>
+        <p:nvSpPr>
+          <p:cNvPr id="3" name="Text 1"/>
+          <p:cNvSpPr/>
+          <p:nvPr/>
+        </p:nvSpPr>
+        <p:spPr>
+          <a:xfrm>
+            <a:off x="406301" y="457051"/>
+            <a:ext cx="8498026" cy="274290"/>
+          </a:xfrm>
+          <a:prstGeom prst="rect">
+            <a:avLst/>
+          </a:prstGeom>
+          <a:noFill/>
+          <a:ln/>
+        </p:spPr>
+        <p:txBody>
+          <a:bodyPr wrap="square" lIns="0" tIns="0" rIns="0" bIns="0" rtlCol="0" anchor="t"/>
+          <a:lstStyle/>
+          <a:p>
+            <a:pPr algn="l" indent="0" marL="0">
+              <a:lnSpc>
+                <a:spcPts val="2160"/>
+              </a:lnSpc>
+              <a:spcBef>
+                <a:spcPts val="600"/>
+              </a:spcBef>
+              <a:spcAft>
+                <a:spcPts val="800"/>
+              </a:spcAft>
+              <a:buNone/>
+            </a:pPr>
+            <a:r>
+              <a:rPr lang="en-US" sz="1800" b="1" dirty="0">
+                <a:solidFill>
+                  <a:srgbClr val="E07A5F"/>
+                </a:solidFill>
+                <a:latin typeface="Georgia" pitchFamily="34" charset="0"/>
+                <a:ea typeface="Georgia" pitchFamily="34" charset="-122"/>
+                <a:cs typeface="Georgia" pitchFamily="34" charset="-120"/>
+              </a:rPr>
+              <a:t>Teacher's quick notes</a:t>
+            </a:r>
+            <a:endParaRPr lang="en-US" sz="1800" dirty="0"/>
+          </a:p>
+        </p:txBody>
+      </p:sp>
+      <p:sp>
+        <p:nvSpPr>
+          <p:cNvPr id="4" name="Text 2"/>
+          <p:cNvSpPr/>
+          <p:nvPr/>
+        </p:nvSpPr>
+        <p:spPr>
+          <a:xfrm>
+            <a:off x="634901" y="883593"/>
+            <a:ext cx="8102798" cy="525661"/>
+          </a:xfrm>
+          <a:prstGeom prst="rect">
+            <a:avLst/>
+          </a:prstGeom>
+          <a:noFill/>
+          <a:ln/>
+        </p:spPr>
+        <p:txBody>
+          <a:bodyPr wrap="square" lIns="0" tIns="0" rIns="0" bIns="0" rtlCol="0" anchor="t"/>
+          <a:lstStyle/>
+          <a:p>
+            <a:pPr algn="l" marL="342900" indent="-342900">
+              <a:lnSpc>
+                <a:spcPts val="1620"/>
+              </a:lnSpc>
+              <a:spcAft>
+                <a:spcPts val="300"/>
+              </a:spcAft>
+              <a:buSzPct val="100000"/>
+              <a:buChar char="•"/>
+            </a:pPr>
+            <a:r>
+              <a:rPr lang="en-US" sz="1200" dirty="0">
+                <a:solidFill>
+                  <a:srgbClr val="2C2C2C"/>
+                </a:solidFill>
+                <a:latin typeface="Verdana" pitchFamily="34" charset="0"/>
+                <a:ea typeface="Verdana" pitchFamily="34" charset="-122"/>
+                <a:cs typeface="Verdana" pitchFamily="34" charset="-120"/>
+              </a:rPr>
+              <a:t>THE knee safety cue is critical. Foot above OR below the knee. NEVER ON the side of the knee.</a:t>
+            </a:r>
+            <a:endParaRPr lang="en-US" sz="1200" dirty="0"/>
+          </a:p>
+          <a:p>
+            <a:pPr algn="l" marL="342900" indent="-342900">
+              <a:lnSpc>
+                <a:spcPts val="1620"/>
+              </a:lnSpc>
+              <a:spcAft>
+                <a:spcPts val="300"/>
+              </a:spcAft>
+              <a:buSzPct val="100000"/>
+              <a:buChar char="•"/>
+            </a:pPr>
+            <a:r>
+              <a:rPr lang="en-US" sz="1200" dirty="0">
+                <a:solidFill>
+                  <a:srgbClr val="2C2C2C"/>
+                </a:solidFill>
+                <a:latin typeface="Verdana" pitchFamily="34" charset="0"/>
+                <a:ea typeface="Verdana" pitchFamily="34" charset="-122"/>
+                <a:cs typeface="Verdana" pitchFamily="34" charset="-120"/>
+              </a:rPr>
+              <a:t>Wobble is information. Falling is information. Both are fine. The skill is </a:t>
+            </a:r>
+            <a:pPr algn="l" indent="0" marL="0">
+              <a:lnSpc>
+                <a:spcPts val="1620"/>
+              </a:lnSpc>
+              <a:spcAft>
+                <a:spcPts val="300"/>
+              </a:spcAft>
+              <a:buNone/>
+            </a:pPr>
+            <a:r>
+              <a:rPr lang="en-US" sz="1200" i="1" dirty="0">
+                <a:solidFill>
+                  <a:srgbClr val="2C2C2C"/>
+                </a:solidFill>
+                <a:latin typeface="Verdana" pitchFamily="34" charset="0"/>
+                <a:ea typeface="Verdana" pitchFamily="34" charset="-122"/>
+                <a:cs typeface="Verdana" pitchFamily="34" charset="-120"/>
+              </a:rPr>
               <a:t>trying again</a:t>
             </a:r>
             <a:pPr algn="l" indent="0" marL="0">
               <a:lnSpc>
-                <a:spcPts val="1680"/>
-              </a:lnSpc>
-              <a:spcBef>
-                <a:spcPts val="300"/>
-              </a:spcBef>
+                <a:spcPts val="1620"/>
+              </a:lnSpc>
               <a:spcAft>
                 <a:spcPts val="300"/>
               </a:spcAft>
@@ -2725,7 +3233,7 @@
                 <a:ea typeface="Georgia" pitchFamily="34" charset="-122"/>
                 <a:cs typeface="Georgia" pitchFamily="34" charset="-120"/>
               </a:rPr>
-              <a:t>Materials</a:t>
+              <a:t>Goal</a:t>
             </a:r>
             <a:endParaRPr lang="en-US" sz="1800" dirty="0"/>
           </a:p>
@@ -2773,7 +3281,7 @@
                 <a:ea typeface="Verdana" pitchFamily="34" charset="-122"/>
                 <a:cs typeface="Verdana" pitchFamily="34" charset="-120"/>
               </a:rPr>
-              <a:t>– Mats – Picture of a tree (and a flamingo)</a:t>
+              <a:t>Children try the tree pose. Wobble is welcome.</a:t>
             </a:r>
             <a:endParaRPr lang="en-US" sz="1200" dirty="0"/>
           </a:p>
@@ -2931,7 +3439,7 @@
                 <a:ea typeface="Georgia" pitchFamily="34" charset="-122"/>
                 <a:cs typeface="Georgia" pitchFamily="34" charset="-120"/>
               </a:rPr>
-              <a:t>The flow</a:t>
+              <a:t>Materials</a:t>
             </a:r>
             <a:endParaRPr lang="en-US" sz="1800" dirty="0"/>
           </a:p>
@@ -2940,6 +3448,76 @@
       <p:sp>
         <p:nvSpPr>
           <p:cNvPr id="4" name="Text 2"/>
+          <p:cNvSpPr/>
+          <p:nvPr/>
+        </p:nvSpPr>
+        <p:spPr>
+          <a:xfrm>
+            <a:off x="634901" y="883593"/>
+            <a:ext cx="8102798" cy="525661"/>
+          </a:xfrm>
+          <a:prstGeom prst="rect">
+            <a:avLst/>
+          </a:prstGeom>
+          <a:noFill/>
+          <a:ln/>
+        </p:spPr>
+        <p:txBody>
+          <a:bodyPr wrap="square" lIns="0" tIns="0" rIns="0" bIns="0" rtlCol="0" anchor="t"/>
+          <a:lstStyle/>
+          <a:p>
+            <a:pPr algn="l" marL="342900" indent="-342900">
+              <a:lnSpc>
+                <a:spcPts val="1620"/>
+              </a:lnSpc>
+              <a:spcAft>
+                <a:spcPts val="300"/>
+              </a:spcAft>
+              <a:buSzPct val="100000"/>
+              <a:buChar char="•"/>
+            </a:pPr>
+            <a:r>
+              <a:rPr lang="en-US" sz="1200" dirty="0">
+                <a:solidFill>
+                  <a:srgbClr val="2C2C2C"/>
+                </a:solidFill>
+                <a:latin typeface="Verdana" pitchFamily="34" charset="0"/>
+                <a:ea typeface="Verdana" pitchFamily="34" charset="-122"/>
+                <a:cs typeface="Verdana" pitchFamily="34" charset="-120"/>
+              </a:rPr>
+              <a:t>Mats</a:t>
+            </a:r>
+            <a:endParaRPr lang="en-US" sz="1200" dirty="0"/>
+          </a:p>
+          <a:p>
+            <a:pPr algn="l" marL="342900" indent="-342900">
+              <a:lnSpc>
+                <a:spcPts val="1620"/>
+              </a:lnSpc>
+              <a:spcAft>
+                <a:spcPts val="300"/>
+              </a:spcAft>
+              <a:buSzPct val="100000"/>
+              <a:buChar char="•"/>
+            </a:pPr>
+            <a:r>
+              <a:rPr lang="en-US" sz="1200" dirty="0">
+                <a:solidFill>
+                  <a:srgbClr val="2C2C2C"/>
+                </a:solidFill>
+                <a:latin typeface="Verdana" pitchFamily="34" charset="0"/>
+                <a:ea typeface="Verdana" pitchFamily="34" charset="-122"/>
+                <a:cs typeface="Verdana" pitchFamily="34" charset="-120"/>
+              </a:rPr>
+              <a:t>Picture of a tree (and a flamingo)</a:t>
+            </a:r>
+            <a:endParaRPr lang="en-US" sz="1200" dirty="0"/>
+          </a:p>
+        </p:txBody>
+      </p:sp>
+      <p:sp>
+        <p:nvSpPr>
+          <p:cNvPr id="5" name="Text 3"/>
           <p:cNvSpPr/>
           <p:nvPr/>
         </p:nvSpPr>
@@ -3089,7 +3667,7 @@
                 <a:ea typeface="Georgia" pitchFamily="34" charset="-122"/>
                 <a:cs typeface="Georgia" pitchFamily="34" charset="-120"/>
               </a:rPr>
-              <a:t>Settle + opening tāḍāsana (3 min)</a:t>
+              <a:t>The flow</a:t>
             </a:r>
             <a:endParaRPr lang="en-US" sz="1800" dirty="0"/>
           </a:p>
@@ -3098,54 +3676,6 @@
       <p:sp>
         <p:nvSpPr>
           <p:cNvPr id="4" name="Text 2"/>
-          <p:cNvSpPr/>
-          <p:nvPr/>
-        </p:nvSpPr>
-        <p:spPr>
-          <a:xfrm>
-            <a:off x="406301" y="870942"/>
-            <a:ext cx="8498026" cy="213271"/>
-          </a:xfrm>
-          <a:prstGeom prst="rect">
-            <a:avLst/>
-          </a:prstGeom>
-          <a:noFill/>
-          <a:ln/>
-        </p:spPr>
-        <p:txBody>
-          <a:bodyPr wrap="square" lIns="0" tIns="0" rIns="0" bIns="0" rtlCol="0" anchor="t"/>
-          <a:lstStyle/>
-          <a:p>
-            <a:pPr algn="l" indent="0" marL="0">
-              <a:lnSpc>
-                <a:spcPts val="1680"/>
-              </a:lnSpc>
-              <a:spcBef>
-                <a:spcPts val="300"/>
-              </a:spcBef>
-              <a:spcAft>
-                <a:spcPts val="300"/>
-              </a:spcAft>
-              <a:buNone/>
-            </a:pPr>
-            <a:r>
-              <a:rPr lang="en-US" sz="1200" dirty="0">
-                <a:solidFill>
-                  <a:srgbClr val="2C2C2C"/>
-                </a:solidFill>
-                <a:latin typeface="Verdana" pitchFamily="34" charset="0"/>
-                <a:ea typeface="Verdana" pitchFamily="34" charset="-122"/>
-                <a:cs typeface="Verdana" pitchFamily="34" charset="-120"/>
-              </a:rPr>
-              <a:t>5 breaths, then 30 sec mountain pose.</a:t>
-            </a:r>
-            <a:endParaRPr lang="en-US" sz="1200" dirty="0"/>
-          </a:p>
-        </p:txBody>
-      </p:sp>
-      <p:sp>
-        <p:nvSpPr>
-          <p:cNvPr id="5" name="Text 3"/>
           <p:cNvSpPr/>
           <p:nvPr/>
         </p:nvSpPr>
@@ -3295,7 +3825,7 @@
                 <a:ea typeface="Georgia" pitchFamily="34" charset="-122"/>
                 <a:cs typeface="Georgia" pitchFamily="34" charset="-120"/>
               </a:rPr>
-              <a:t>Story (5 min)</a:t>
+              <a:t>Settle + opening tāḍāsana (3 min)</a:t>
             </a:r>
             <a:endParaRPr lang="en-US" sz="1800" dirty="0"/>
           </a:p>
@@ -3310,7 +3840,7 @@
         <p:spPr>
           <a:xfrm>
             <a:off x="406301" y="870942"/>
-            <a:ext cx="8498026" cy="426541"/>
+            <a:ext cx="8498026" cy="213271"/>
           </a:xfrm>
           <a:prstGeom prst="rect">
             <a:avLst/>
@@ -3335,7 +3865,7 @@
               <a:buNone/>
             </a:pPr>
             <a:r>
-              <a:rPr lang="en-US" sz="1200" i="1" dirty="0">
+              <a:rPr lang="en-US" sz="1200" dirty="0">
                 <a:solidFill>
                   <a:srgbClr val="2C2C2C"/>
                 </a:solidFill>
@@ -3343,53 +3873,7 @@
                 <a:ea typeface="Verdana" pitchFamily="34" charset="-122"/>
                 <a:cs typeface="Verdana" pitchFamily="34" charset="-120"/>
               </a:rPr>
-              <a:t>"Today's pose is </a:t>
-            </a:r>
-            <a:pPr algn="l" indent="0" marL="0">
-              <a:lnSpc>
-                <a:spcPts val="1680"/>
-              </a:lnSpc>
-              <a:spcBef>
-                <a:spcPts val="300"/>
-              </a:spcBef>
-              <a:spcAft>
-                <a:spcPts val="300"/>
-              </a:spcAft>
-              <a:buNone/>
-            </a:pPr>
-            <a:r>
-              <a:rPr lang="en-US" sz="1200" b="1" i="1" dirty="0">
-                <a:solidFill>
-                  <a:srgbClr val="2C2C2C"/>
-                </a:solidFill>
-                <a:latin typeface="Verdana" pitchFamily="34" charset="0"/>
-                <a:ea typeface="Verdana" pitchFamily="34" charset="-122"/>
-                <a:cs typeface="Verdana" pitchFamily="34" charset="-120"/>
-              </a:rPr>
-              <a:t>vṛkṣāsana</a:t>
-            </a:r>
-            <a:pPr algn="l" indent="0" marL="0">
-              <a:lnSpc>
-                <a:spcPts val="1680"/>
-              </a:lnSpc>
-              <a:spcBef>
-                <a:spcPts val="300"/>
-              </a:spcBef>
-              <a:spcAft>
-                <a:spcPts val="300"/>
-              </a:spcAft>
-              <a:buNone/>
-            </a:pPr>
-            <a:r>
-              <a:rPr lang="en-US" sz="1200" i="1" dirty="0">
-                <a:solidFill>
-                  <a:srgbClr val="2C2C2C"/>
-                </a:solidFill>
-                <a:latin typeface="Verdana" pitchFamily="34" charset="0"/>
-                <a:ea typeface="Verdana" pitchFamily="34" charset="-122"/>
-                <a:cs typeface="Verdana" pitchFamily="34" charset="-120"/>
-              </a:rPr>
-              <a:t> — tree pose. A tree stands tall on one root. Today YOU'll stand tall on one foot."</a:t>
+              <a:t>5 breaths, then 30 sec mountain pose.</a:t>
             </a:r>
             <a:endParaRPr lang="en-US" sz="1200" dirty="0"/>
           </a:p>
@@ -3398,54 +3882,6 @@
       <p:sp>
         <p:nvSpPr>
           <p:cNvPr id="5" name="Text 3"/>
-          <p:cNvSpPr/>
-          <p:nvPr/>
-        </p:nvSpPr>
-        <p:spPr>
-          <a:xfrm>
-            <a:off x="406301" y="1373684"/>
-            <a:ext cx="8498026" cy="213271"/>
-          </a:xfrm>
-          <a:prstGeom prst="rect">
-            <a:avLst/>
-          </a:prstGeom>
-          <a:noFill/>
-          <a:ln/>
-        </p:spPr>
-        <p:txBody>
-          <a:bodyPr wrap="square" lIns="0" tIns="0" rIns="0" bIns="0" rtlCol="0" anchor="t"/>
-          <a:lstStyle/>
-          <a:p>
-            <a:pPr algn="l" indent="0" marL="0">
-              <a:lnSpc>
-                <a:spcPts val="1680"/>
-              </a:lnSpc>
-              <a:spcBef>
-                <a:spcPts val="300"/>
-              </a:spcBef>
-              <a:spcAft>
-                <a:spcPts val="300"/>
-              </a:spcAft>
-              <a:buNone/>
-            </a:pPr>
-            <a:r>
-              <a:rPr lang="en-US" sz="1200" i="1" dirty="0">
-                <a:solidFill>
-                  <a:srgbClr val="2C2C2C"/>
-                </a:solidFill>
-                <a:latin typeface="Verdana" pitchFamily="34" charset="0"/>
-                <a:ea typeface="Verdana" pitchFamily="34" charset="-122"/>
-                <a:cs typeface="Verdana" pitchFamily="34" charset="-120"/>
-              </a:rPr>
-              <a:t>"Trees sway a little. So will you. That's totally OK."</a:t>
-            </a:r>
-            <a:endParaRPr lang="en-US" sz="1200" dirty="0"/>
-          </a:p>
-        </p:txBody>
-      </p:sp>
-      <p:sp>
-        <p:nvSpPr>
-          <p:cNvPr id="6" name="Text 4"/>
           <p:cNvSpPr/>
           <p:nvPr/>
         </p:nvSpPr>
@@ -3595,7 +4031,7 @@
                 <a:ea typeface="Georgia" pitchFamily="34" charset="-122"/>
                 <a:cs typeface="Georgia" pitchFamily="34" charset="-120"/>
               </a:rPr>
-              <a:t>Tree practice (15 min)</a:t>
+              <a:t>Story (5 min)</a:t>
             </a:r>
             <a:endParaRPr lang="en-US" sz="1800" dirty="0"/>
           </a:p>
@@ -3609,8 +4045,8 @@
         </p:nvSpPr>
         <p:spPr>
           <a:xfrm>
-            <a:off x="634901" y="883593"/>
-            <a:ext cx="8102798" cy="1462683"/>
+            <a:off x="406301" y="870942"/>
+            <a:ext cx="8498026" cy="426541"/>
           </a:xfrm>
           <a:prstGeom prst="rect">
             <a:avLst/>
@@ -3622,15 +4058,17 @@
           <a:bodyPr wrap="square" lIns="0" tIns="0" rIns="0" bIns="0" rtlCol="0" anchor="t"/>
           <a:lstStyle/>
           <a:p>
-            <a:pPr algn="l" marL="342900" indent="-342900">
-              <a:lnSpc>
-                <a:spcPts val="1620"/>
-              </a:lnSpc>
-              <a:spcAft>
-                <a:spcPts val="300"/>
-              </a:spcAft>
-              <a:buSzPct val="100000"/>
-              <a:buChar char="•"/>
+            <a:pPr algn="l" indent="0" marL="0">
+              <a:lnSpc>
+                <a:spcPts val="1680"/>
+              </a:lnSpc>
+              <a:spcBef>
+                <a:spcPts val="300"/>
+              </a:spcBef>
+              <a:spcAft>
+                <a:spcPts val="300"/>
+              </a:spcAft>
+              <a:buNone/>
             </a:pPr>
             <a:r>
               <a:rPr lang="en-US" sz="1200" i="1" dirty="0">
@@ -3641,23 +4079,22 @@
                 <a:ea typeface="Verdana" pitchFamily="34" charset="-122"/>
                 <a:cs typeface="Verdana" pitchFamily="34" charset="-120"/>
               </a:rPr>
-              <a:t>"Start in mountain. Move your weight onto your LEFT foot."</a:t>
-            </a:r>
-            <a:endParaRPr lang="en-US" sz="1200" dirty="0"/>
-          </a:p>
-          <a:p>
-            <a:pPr algn="l" marL="342900" indent="-342900">
-              <a:lnSpc>
-                <a:spcPts val="1620"/>
-              </a:lnSpc>
-              <a:spcAft>
-                <a:spcPts val="300"/>
-              </a:spcAft>
-              <a:buSzPct val="100000"/>
-              <a:buChar char="•"/>
-            </a:pPr>
-            <a:r>
-              <a:rPr lang="en-US" sz="1200" i="1" dirty="0">
+              <a:t>"Today's pose is </a:t>
+            </a:r>
+            <a:pPr algn="l" indent="0" marL="0">
+              <a:lnSpc>
+                <a:spcPts val="1680"/>
+              </a:lnSpc>
+              <a:spcBef>
+                <a:spcPts val="300"/>
+              </a:spcBef>
+              <a:spcAft>
+                <a:spcPts val="300"/>
+              </a:spcAft>
+              <a:buNone/>
+            </a:pPr>
+            <a:r>
+              <a:rPr lang="en-US" sz="1200" b="1" i="1" dirty="0">
                 <a:solidFill>
                   <a:srgbClr val="2C2C2C"/>
                 </a:solidFill>
@@ -3665,20 +4102,19 @@
                 <a:ea typeface="Verdana" pitchFamily="34" charset="-122"/>
                 <a:cs typeface="Verdana" pitchFamily="34" charset="-120"/>
               </a:rPr>
-              <a:t>"Now bend your RIGHT knee. Put the SOLE of your right foot against the INSIDE of your LEFT calf. Or below the knee. NOT on the knee."</a:t>
-            </a:r>
-            <a:endParaRPr lang="en-US" sz="1200" dirty="0"/>
-          </a:p>
-          <a:p>
-            <a:pPr algn="l" marL="342900" indent="-342900">
-              <a:lnSpc>
-                <a:spcPts val="1620"/>
-              </a:lnSpc>
-              <a:spcAft>
-                <a:spcPts val="300"/>
-              </a:spcAft>
-              <a:buSzPct val="100000"/>
-              <a:buChar char="•"/>
+              <a:t>vṛkṣāsana</a:t>
+            </a:r>
+            <a:pPr algn="l" indent="0" marL="0">
+              <a:lnSpc>
+                <a:spcPts val="1680"/>
+              </a:lnSpc>
+              <a:spcBef>
+                <a:spcPts val="300"/>
+              </a:spcBef>
+              <a:spcAft>
+                <a:spcPts val="300"/>
+              </a:spcAft>
+              <a:buNone/>
             </a:pPr>
             <a:r>
               <a:rPr lang="en-US" sz="1200" i="1" dirty="0">
@@ -3689,20 +4125,44 @@
                 <a:ea typeface="Verdana" pitchFamily="34" charset="-122"/>
                 <a:cs typeface="Verdana" pitchFamily="34" charset="-120"/>
               </a:rPr>
-              <a:t>"Hands at heart — palms together. Or raise them like branches over your head."</a:t>
+              <a:t> — tree pose. A tree stands tall on one root. Today YOU'll stand tall on one foot."</a:t>
             </a:r>
             <a:endParaRPr lang="en-US" sz="1200" dirty="0"/>
           </a:p>
-          <a:p>
-            <a:pPr algn="l" marL="342900" indent="-342900">
-              <a:lnSpc>
-                <a:spcPts val="1620"/>
-              </a:lnSpc>
-              <a:spcAft>
-                <a:spcPts val="300"/>
-              </a:spcAft>
-              <a:buSzPct val="100000"/>
-              <a:buChar char="•"/>
+        </p:txBody>
+      </p:sp>
+      <p:sp>
+        <p:nvSpPr>
+          <p:cNvPr id="5" name="Text 3"/>
+          <p:cNvSpPr/>
+          <p:nvPr/>
+        </p:nvSpPr>
+        <p:spPr>
+          <a:xfrm>
+            <a:off x="406301" y="1373684"/>
+            <a:ext cx="8498026" cy="213271"/>
+          </a:xfrm>
+          <a:prstGeom prst="rect">
+            <a:avLst/>
+          </a:prstGeom>
+          <a:noFill/>
+          <a:ln/>
+        </p:spPr>
+        <p:txBody>
+          <a:bodyPr wrap="square" lIns="0" tIns="0" rIns="0" bIns="0" rtlCol="0" anchor="t"/>
+          <a:lstStyle/>
+          <a:p>
+            <a:pPr algn="l" indent="0" marL="0">
+              <a:lnSpc>
+                <a:spcPts val="1680"/>
+              </a:lnSpc>
+              <a:spcBef>
+                <a:spcPts val="300"/>
+              </a:spcBef>
+              <a:spcAft>
+                <a:spcPts val="300"/>
+              </a:spcAft>
+              <a:buNone/>
             </a:pPr>
             <a:r>
               <a:rPr lang="en-US" sz="1200" i="1" dirty="0">
@@ -3713,229 +4173,15 @@
                 <a:ea typeface="Verdana" pitchFamily="34" charset="-122"/>
                 <a:cs typeface="Verdana" pitchFamily="34" charset="-120"/>
               </a:rPr>
-              <a:t>"Look at one spot on the wall and keep looking at it."</a:t>
+              <a:t>"Trees sway a little. So will you. That's totally OK."</a:t>
             </a:r>
             <a:endParaRPr lang="en-US" sz="1200" dirty="0"/>
           </a:p>
-          <a:p>
-            <a:pPr algn="l" marL="342900" indent="-342900">
-              <a:lnSpc>
-                <a:spcPts val="1620"/>
-              </a:lnSpc>
-              <a:spcAft>
-                <a:spcPts val="300"/>
-              </a:spcAft>
-              <a:buSzPct val="100000"/>
-              <a:buChar char="•"/>
-            </a:pPr>
-            <a:r>
-              <a:rPr lang="en-US" sz="1200" i="1" dirty="0">
-                <a:solidFill>
-                  <a:srgbClr val="2C2C2C"/>
-                </a:solidFill>
-                <a:latin typeface="Verdana" pitchFamily="34" charset="0"/>
-                <a:ea typeface="Verdana" pitchFamily="34" charset="-122"/>
-                <a:cs typeface="Verdana" pitchFamily="34" charset="-120"/>
-              </a:rPr>
-              <a:t>"Breathe like a calm tree."</a:t>
-            </a:r>
-            <a:endParaRPr lang="en-US" sz="1200" dirty="0"/>
-          </a:p>
-        </p:txBody>
-      </p:sp>
-      <p:sp>
-        <p:nvSpPr>
-          <p:cNvPr id="5" name="Text 3"/>
-          <p:cNvSpPr/>
-          <p:nvPr/>
-        </p:nvSpPr>
-        <p:spPr>
-          <a:xfrm>
-            <a:off x="406301" y="2435126"/>
-            <a:ext cx="8498026" cy="213271"/>
-          </a:xfrm>
-          <a:prstGeom prst="rect">
-            <a:avLst/>
-          </a:prstGeom>
-          <a:noFill/>
-          <a:ln/>
-        </p:spPr>
-        <p:txBody>
-          <a:bodyPr wrap="square" lIns="0" tIns="0" rIns="0" bIns="0" rtlCol="0" anchor="t"/>
-          <a:lstStyle/>
-          <a:p>
-            <a:pPr algn="l" indent="0" marL="0">
-              <a:lnSpc>
-                <a:spcPts val="1680"/>
-              </a:lnSpc>
-              <a:spcBef>
-                <a:spcPts val="300"/>
-              </a:spcBef>
-              <a:spcAft>
-                <a:spcPts val="300"/>
-              </a:spcAft>
-              <a:buNone/>
-            </a:pPr>
-            <a:r>
-              <a:rPr lang="en-US" sz="1200" dirty="0">
-                <a:solidFill>
-                  <a:srgbClr val="2C2C2C"/>
-                </a:solidFill>
-                <a:latin typeface="Verdana" pitchFamily="34" charset="0"/>
-                <a:ea typeface="Verdana" pitchFamily="34" charset="-122"/>
-                <a:cs typeface="Verdana" pitchFamily="34" charset="-120"/>
-              </a:rPr>
-              <a:t>– Hold 15 sec. Switch sides. Hold 15 sec. – Repeat 3 times each side.</a:t>
-            </a:r>
-            <a:endParaRPr lang="en-US" sz="1200" dirty="0"/>
-          </a:p>
         </p:txBody>
       </p:sp>
       <p:sp>
         <p:nvSpPr>
           <p:cNvPr id="6" name="Text 4"/>
-          <p:cNvSpPr/>
-          <p:nvPr/>
-        </p:nvSpPr>
-        <p:spPr>
-          <a:xfrm>
-            <a:off x="406301" y="2724596"/>
-            <a:ext cx="8498026" cy="213271"/>
-          </a:xfrm>
-          <a:prstGeom prst="rect">
-            <a:avLst/>
-          </a:prstGeom>
-          <a:noFill/>
-          <a:ln/>
-        </p:spPr>
-        <p:txBody>
-          <a:bodyPr wrap="square" lIns="0" tIns="0" rIns="0" bIns="0" rtlCol="0" anchor="t"/>
-          <a:lstStyle/>
-          <a:p>
-            <a:pPr algn="l" indent="0" marL="0">
-              <a:lnSpc>
-                <a:spcPts val="1680"/>
-              </a:lnSpc>
-              <a:spcBef>
-                <a:spcPts val="300"/>
-              </a:spcBef>
-              <a:spcAft>
-                <a:spcPts val="300"/>
-              </a:spcAft>
-              <a:buNone/>
-            </a:pPr>
-            <a:r>
-              <a:rPr lang="en-US" sz="1200" dirty="0">
-                <a:solidFill>
-                  <a:srgbClr val="2C2C2C"/>
-                </a:solidFill>
-                <a:latin typeface="Verdana" pitchFamily="34" charset="0"/>
-                <a:ea typeface="Verdana" pitchFamily="34" charset="-122"/>
-                <a:cs typeface="Verdana" pitchFamily="34" charset="-120"/>
-              </a:rPr>
-              <a:t>If children wobble: </a:t>
-            </a:r>
-            <a:pPr algn="l" indent="0" marL="0">
-              <a:lnSpc>
-                <a:spcPts val="1680"/>
-              </a:lnSpc>
-              <a:spcBef>
-                <a:spcPts val="300"/>
-              </a:spcBef>
-              <a:spcAft>
-                <a:spcPts val="300"/>
-              </a:spcAft>
-              <a:buNone/>
-            </a:pPr>
-            <a:r>
-              <a:rPr lang="en-US" sz="1200" i="1" dirty="0">
-                <a:solidFill>
-                  <a:srgbClr val="2C2C2C"/>
-                </a:solidFill>
-                <a:latin typeface="Verdana" pitchFamily="34" charset="0"/>
-                <a:ea typeface="Verdana" pitchFamily="34" charset="-122"/>
-                <a:cs typeface="Verdana" pitchFamily="34" charset="-120"/>
-              </a:rPr>
-              <a:t>"Trees sway in the wind! Wobble is what balance feels like when it's learning."</a:t>
-            </a:r>
-            <a:endParaRPr lang="en-US" sz="1200" dirty="0"/>
-          </a:p>
-        </p:txBody>
-      </p:sp>
-      <p:sp>
-        <p:nvSpPr>
-          <p:cNvPr id="7" name="Text 5"/>
-          <p:cNvSpPr/>
-          <p:nvPr/>
-        </p:nvSpPr>
-        <p:spPr>
-          <a:xfrm>
-            <a:off x="406301" y="3014067"/>
-            <a:ext cx="8498026" cy="213271"/>
-          </a:xfrm>
-          <a:prstGeom prst="rect">
-            <a:avLst/>
-          </a:prstGeom>
-          <a:noFill/>
-          <a:ln/>
-        </p:spPr>
-        <p:txBody>
-          <a:bodyPr wrap="square" lIns="0" tIns="0" rIns="0" bIns="0" rtlCol="0" anchor="t"/>
-          <a:lstStyle/>
-          <a:p>
-            <a:pPr algn="l" indent="0" marL="0">
-              <a:lnSpc>
-                <a:spcPts val="1680"/>
-              </a:lnSpc>
-              <a:spcBef>
-                <a:spcPts val="300"/>
-              </a:spcBef>
-              <a:spcAft>
-                <a:spcPts val="300"/>
-              </a:spcAft>
-              <a:buNone/>
-            </a:pPr>
-            <a:r>
-              <a:rPr lang="en-US" sz="1200" dirty="0">
-                <a:solidFill>
-                  <a:srgbClr val="2C2C2C"/>
-                </a:solidFill>
-                <a:latin typeface="Verdana" pitchFamily="34" charset="0"/>
-                <a:ea typeface="Verdana" pitchFamily="34" charset="-122"/>
-                <a:cs typeface="Verdana" pitchFamily="34" charset="-120"/>
-              </a:rPr>
-              <a:t>If children fall: laugh together. </a:t>
-            </a:r>
-            <a:pPr algn="l" indent="0" marL="0">
-              <a:lnSpc>
-                <a:spcPts val="1680"/>
-              </a:lnSpc>
-              <a:spcBef>
-                <a:spcPts val="300"/>
-              </a:spcBef>
-              <a:spcAft>
-                <a:spcPts val="300"/>
-              </a:spcAft>
-              <a:buNone/>
-            </a:pPr>
-            <a:r>
-              <a:rPr lang="en-US" sz="1200" i="1" dirty="0">
-                <a:solidFill>
-                  <a:srgbClr val="2C2C2C"/>
-                </a:solidFill>
-                <a:latin typeface="Verdana" pitchFamily="34" charset="0"/>
-                <a:ea typeface="Verdana" pitchFamily="34" charset="-122"/>
-                <a:cs typeface="Verdana" pitchFamily="34" charset="-120"/>
-              </a:rPr>
-              <a:t>"Try again."</a:t>
-            </a:r>
-            <a:endParaRPr lang="en-US" sz="1200" dirty="0"/>
-          </a:p>
-        </p:txBody>
-      </p:sp>
-      <p:sp>
-        <p:nvSpPr>
-          <p:cNvPr id="8" name="Text 6"/>
           <p:cNvSpPr/>
           <p:nvPr/>
         </p:nvSpPr>
@@ -4085,7 +4331,7 @@
                 <a:ea typeface="Georgia" pitchFamily="34" charset="-122"/>
                 <a:cs typeface="Georgia" pitchFamily="34" charset="-120"/>
               </a:rPr>
-              <a:t>Reflection (4 min)</a:t>
+              <a:t>Tree practice (15 min)</a:t>
             </a:r>
             <a:endParaRPr lang="en-US" sz="1800" dirty="0"/>
           </a:p>
@@ -4100,7 +4346,7 @@
         <p:spPr>
           <a:xfrm>
             <a:off x="634901" y="883593"/>
-            <a:ext cx="8102798" cy="525661"/>
+            <a:ext cx="8102798" cy="1950244"/>
           </a:xfrm>
           <a:prstGeom prst="rect">
             <a:avLst/>
@@ -4131,7 +4377,7 @@
                 <a:ea typeface="Verdana" pitchFamily="34" charset="-122"/>
                 <a:cs typeface="Verdana" pitchFamily="34" charset="-120"/>
               </a:rPr>
-              <a:t>"Which side was easier?"</a:t>
+              <a:t>"Start in mountain. Move your weight onto your LEFT foot."</a:t>
             </a:r>
             <a:endParaRPr lang="en-US" sz="1200" dirty="0"/>
           </a:p>
@@ -4155,7 +4401,127 @@
                 <a:ea typeface="Verdana" pitchFamily="34" charset="-122"/>
                 <a:cs typeface="Verdana" pitchFamily="34" charset="-120"/>
               </a:rPr>
-              <a:t>"What did your eyes look at?"</a:t>
+              <a:t>"Now bend your RIGHT knee. Put the SOLE of your right foot against the INSIDE of your LEFT calf. Or below the knee. NOT on the knee."</a:t>
+            </a:r>
+            <a:endParaRPr lang="en-US" sz="1200" dirty="0"/>
+          </a:p>
+          <a:p>
+            <a:pPr algn="l" marL="342900" indent="-342900">
+              <a:lnSpc>
+                <a:spcPts val="1620"/>
+              </a:lnSpc>
+              <a:spcAft>
+                <a:spcPts val="300"/>
+              </a:spcAft>
+              <a:buSzPct val="100000"/>
+              <a:buChar char="•"/>
+            </a:pPr>
+            <a:r>
+              <a:rPr lang="en-US" sz="1200" i="1" dirty="0">
+                <a:solidFill>
+                  <a:srgbClr val="2C2C2C"/>
+                </a:solidFill>
+                <a:latin typeface="Verdana" pitchFamily="34" charset="0"/>
+                <a:ea typeface="Verdana" pitchFamily="34" charset="-122"/>
+                <a:cs typeface="Verdana" pitchFamily="34" charset="-120"/>
+              </a:rPr>
+              <a:t>"Hands at heart — palms together. Or raise them like branches over your head."</a:t>
+            </a:r>
+            <a:endParaRPr lang="en-US" sz="1200" dirty="0"/>
+          </a:p>
+          <a:p>
+            <a:pPr algn="l" marL="342900" indent="-342900">
+              <a:lnSpc>
+                <a:spcPts val="1620"/>
+              </a:lnSpc>
+              <a:spcAft>
+                <a:spcPts val="300"/>
+              </a:spcAft>
+              <a:buSzPct val="100000"/>
+              <a:buChar char="•"/>
+            </a:pPr>
+            <a:r>
+              <a:rPr lang="en-US" sz="1200" i="1" dirty="0">
+                <a:solidFill>
+                  <a:srgbClr val="2C2C2C"/>
+                </a:solidFill>
+                <a:latin typeface="Verdana" pitchFamily="34" charset="0"/>
+                <a:ea typeface="Verdana" pitchFamily="34" charset="-122"/>
+                <a:cs typeface="Verdana" pitchFamily="34" charset="-120"/>
+              </a:rPr>
+              <a:t>"Look at one spot on the wall and keep looking at it."</a:t>
+            </a:r>
+            <a:endParaRPr lang="en-US" sz="1200" dirty="0"/>
+          </a:p>
+          <a:p>
+            <a:pPr algn="l" marL="342900" indent="-342900">
+              <a:lnSpc>
+                <a:spcPts val="1620"/>
+              </a:lnSpc>
+              <a:spcAft>
+                <a:spcPts val="300"/>
+              </a:spcAft>
+              <a:buSzPct val="100000"/>
+              <a:buChar char="•"/>
+            </a:pPr>
+            <a:r>
+              <a:rPr lang="en-US" sz="1200" i="1" dirty="0">
+                <a:solidFill>
+                  <a:srgbClr val="2C2C2C"/>
+                </a:solidFill>
+                <a:latin typeface="Verdana" pitchFamily="34" charset="0"/>
+                <a:ea typeface="Verdana" pitchFamily="34" charset="-122"/>
+                <a:cs typeface="Verdana" pitchFamily="34" charset="-120"/>
+              </a:rPr>
+              <a:t>"Breathe like a calm tree."</a:t>
+            </a:r>
+            <a:endParaRPr lang="en-US" sz="1200" dirty="0"/>
+          </a:p>
+          <a:p>
+            <a:pPr algn="l" marL="342900" indent="-342900">
+              <a:lnSpc>
+                <a:spcPts val="1620"/>
+              </a:lnSpc>
+              <a:spcAft>
+                <a:spcPts val="300"/>
+              </a:spcAft>
+              <a:buSzPct val="100000"/>
+              <a:buChar char="•"/>
+            </a:pPr>
+            <a:r>
+              <a:rPr lang="en-US" sz="1200" dirty="0">
+                <a:solidFill>
+                  <a:srgbClr val="2C2C2C"/>
+                </a:solidFill>
+                <a:latin typeface="Verdana" pitchFamily="34" charset="0"/>
+                <a:ea typeface="Verdana" pitchFamily="34" charset="-122"/>
+                <a:cs typeface="Verdana" pitchFamily="34" charset="-120"/>
+              </a:rPr>
+              <a:t>Hold 15 sec. Switch sides. Hold 15 sec.</a:t>
+            </a:r>
+            <a:endParaRPr lang="en-US" sz="1200" dirty="0"/>
+          </a:p>
+          <a:p>
+            <a:pPr algn="l" marL="342900" indent="-342900">
+              <a:lnSpc>
+                <a:spcPts val="1620"/>
+              </a:lnSpc>
+              <a:spcAft>
+                <a:spcPts val="300"/>
+              </a:spcAft>
+              <a:buSzPct val="100000"/>
+              <a:buChar char="•"/>
+            </a:pPr>
+            <a:r>
+              <a:rPr lang="en-US" sz="1200" dirty="0">
+                <a:solidFill>
+                  <a:srgbClr val="2C2C2C"/>
+                </a:solidFill>
+                <a:latin typeface="Verdana" pitchFamily="34" charset="0"/>
+                <a:ea typeface="Verdana" pitchFamily="34" charset="-122"/>
+                <a:cs typeface="Verdana" pitchFamily="34" charset="-120"/>
+              </a:rPr>
+              <a:t>Repeat 3 times each side.</a:t>
             </a:r>
             <a:endParaRPr lang="en-US" sz="1200" dirty="0"/>
           </a:p>
@@ -4313,7 +4679,7 @@
                 <a:ea typeface="Georgia" pitchFamily="34" charset="-122"/>
                 <a:cs typeface="Georgia" pitchFamily="34" charset="-120"/>
               </a:rPr>
-              <a:t>Close (3 min)</a:t>
+              <a:t>Tree practice (15 min) (cont.)</a:t>
             </a:r>
             <a:endParaRPr lang="en-US" sz="1800" dirty="0"/>
           </a:p>
@@ -4361,7 +4727,30 @@
                 <a:ea typeface="Verdana" pitchFamily="34" charset="-122"/>
                 <a:cs typeface="Verdana" pitchFamily="34" charset="-120"/>
               </a:rPr>
-              <a:t>Tāḍāsana. Namaste.</a:t>
+              <a:t>If children wobble: </a:t>
+            </a:r>
+            <a:pPr algn="l" indent="0" marL="0">
+              <a:lnSpc>
+                <a:spcPts val="1680"/>
+              </a:lnSpc>
+              <a:spcBef>
+                <a:spcPts val="300"/>
+              </a:spcBef>
+              <a:spcAft>
+                <a:spcPts val="300"/>
+              </a:spcAft>
+              <a:buNone/>
+            </a:pPr>
+            <a:r>
+              <a:rPr lang="en-US" sz="1200" i="1" dirty="0">
+                <a:solidFill>
+                  <a:srgbClr val="2C2C2C"/>
+                </a:solidFill>
+                <a:latin typeface="Verdana" pitchFamily="34" charset="0"/>
+                <a:ea typeface="Verdana" pitchFamily="34" charset="-122"/>
+                <a:cs typeface="Verdana" pitchFamily="34" charset="-120"/>
+              </a:rPr>
+              <a:t>"Trees sway in the wind! Wobble is what balance feels like when it's learning."</a:t>
             </a:r>
             <a:endParaRPr lang="en-US" sz="1200" dirty="0"/>
           </a:p>
@@ -4370,6 +4759,77 @@
       <p:sp>
         <p:nvSpPr>
           <p:cNvPr id="5" name="Text 3"/>
+          <p:cNvSpPr/>
+          <p:nvPr/>
+        </p:nvSpPr>
+        <p:spPr>
+          <a:xfrm>
+            <a:off x="406301" y="1160413"/>
+            <a:ext cx="8498026" cy="213271"/>
+          </a:xfrm>
+          <a:prstGeom prst="rect">
+            <a:avLst/>
+          </a:prstGeom>
+          <a:noFill/>
+          <a:ln/>
+        </p:spPr>
+        <p:txBody>
+          <a:bodyPr wrap="square" lIns="0" tIns="0" rIns="0" bIns="0" rtlCol="0" anchor="t"/>
+          <a:lstStyle/>
+          <a:p>
+            <a:pPr algn="l" indent="0" marL="0">
+              <a:lnSpc>
+                <a:spcPts val="1680"/>
+              </a:lnSpc>
+              <a:spcBef>
+                <a:spcPts val="300"/>
+              </a:spcBef>
+              <a:spcAft>
+                <a:spcPts val="300"/>
+              </a:spcAft>
+              <a:buNone/>
+            </a:pPr>
+            <a:r>
+              <a:rPr lang="en-US" sz="1200" dirty="0">
+                <a:solidFill>
+                  <a:srgbClr val="2C2C2C"/>
+                </a:solidFill>
+                <a:latin typeface="Verdana" pitchFamily="34" charset="0"/>
+                <a:ea typeface="Verdana" pitchFamily="34" charset="-122"/>
+                <a:cs typeface="Verdana" pitchFamily="34" charset="-120"/>
+              </a:rPr>
+              <a:t>If children fall: laugh together. </a:t>
+            </a:r>
+            <a:pPr algn="l" indent="0" marL="0">
+              <a:lnSpc>
+                <a:spcPts val="1680"/>
+              </a:lnSpc>
+              <a:spcBef>
+                <a:spcPts val="300"/>
+              </a:spcBef>
+              <a:spcAft>
+                <a:spcPts val="300"/>
+              </a:spcAft>
+              <a:buNone/>
+            </a:pPr>
+            <a:r>
+              <a:rPr lang="en-US" sz="1200" i="1" dirty="0">
+                <a:solidFill>
+                  <a:srgbClr val="2C2C2C"/>
+                </a:solidFill>
+                <a:latin typeface="Verdana" pitchFamily="34" charset="0"/>
+                <a:ea typeface="Verdana" pitchFamily="34" charset="-122"/>
+                <a:cs typeface="Verdana" pitchFamily="34" charset="-120"/>
+              </a:rPr>
+              <a:t>"Try again."</a:t>
+            </a:r>
+            <a:endParaRPr lang="en-US" sz="1200" dirty="0"/>
+          </a:p>
+        </p:txBody>
+      </p:sp>
+      <p:sp>
+        <p:nvSpPr>
+          <p:cNvPr id="6" name="Text 4"/>
           <p:cNvSpPr/>
           <p:nvPr/>
         </p:nvSpPr>
@@ -4519,7 +4979,7 @@
                 <a:ea typeface="Georgia" pitchFamily="34" charset="-122"/>
                 <a:cs typeface="Georgia" pitchFamily="34" charset="-120"/>
               </a:rPr>
-              <a:t>Homework</a:t>
+              <a:t>Reflection (4 min)</a:t>
             </a:r>
             <a:endParaRPr lang="en-US" sz="1800" dirty="0"/>
           </a:p>
@@ -4533,8 +4993,8 @@
         </p:nvSpPr>
         <p:spPr>
           <a:xfrm>
-            <a:off x="406301" y="870942"/>
-            <a:ext cx="8498026" cy="213271"/>
+            <a:off x="634901" y="883593"/>
+            <a:ext cx="8102798" cy="525661"/>
           </a:xfrm>
           <a:prstGeom prst="rect">
             <a:avLst/>
@@ -4546,20 +5006,18 @@
           <a:bodyPr wrap="square" lIns="0" tIns="0" rIns="0" bIns="0" rtlCol="0" anchor="t"/>
           <a:lstStyle/>
           <a:p>
-            <a:pPr algn="l" indent="0" marL="0">
-              <a:lnSpc>
-                <a:spcPts val="1680"/>
-              </a:lnSpc>
-              <a:spcBef>
-                <a:spcPts val="300"/>
-              </a:spcBef>
-              <a:spcAft>
-                <a:spcPts val="300"/>
-              </a:spcAft>
-              <a:buNone/>
-            </a:pPr>
-            <a:r>
-              <a:rPr lang="en-US" sz="1200" dirty="0">
+            <a:pPr algn="l" marL="342900" indent="-342900">
+              <a:lnSpc>
+                <a:spcPts val="1620"/>
+              </a:lnSpc>
+              <a:spcAft>
+                <a:spcPts val="300"/>
+              </a:spcAft>
+              <a:buSzPct val="100000"/>
+              <a:buChar char="•"/>
+            </a:pPr>
+            <a:r>
+              <a:rPr lang="en-US" sz="1200" i="1" dirty="0">
                 <a:solidFill>
                   <a:srgbClr val="2C2C2C"/>
                 </a:solidFill>
@@ -4567,7 +5025,31 @@
                 <a:ea typeface="Verdana" pitchFamily="34" charset="-122"/>
                 <a:cs typeface="Verdana" pitchFamily="34" charset="-120"/>
               </a:rPr>
-              <a:t>– Stand on one leg at home for 10 seconds. Switch. Repeat. (Brush teeth while doing it!)</a:t>
+              <a:t>"Which side was easier?"</a:t>
+            </a:r>
+            <a:endParaRPr lang="en-US" sz="1200" dirty="0"/>
+          </a:p>
+          <a:p>
+            <a:pPr algn="l" marL="342900" indent="-342900">
+              <a:lnSpc>
+                <a:spcPts val="1620"/>
+              </a:lnSpc>
+              <a:spcAft>
+                <a:spcPts val="300"/>
+              </a:spcAft>
+              <a:buSzPct val="100000"/>
+              <a:buChar char="•"/>
+            </a:pPr>
+            <a:r>
+              <a:rPr lang="en-US" sz="1200" i="1" dirty="0">
+                <a:solidFill>
+                  <a:srgbClr val="2C2C2C"/>
+                </a:solidFill>
+                <a:latin typeface="Verdana" pitchFamily="34" charset="0"/>
+                <a:ea typeface="Verdana" pitchFamily="34" charset="-122"/>
+                <a:cs typeface="Verdana" pitchFamily="34" charset="-120"/>
+              </a:rPr>
+              <a:t>"What did your eyes look at?"</a:t>
             </a:r>
             <a:endParaRPr lang="en-US" sz="1200" dirty="0"/>
           </a:p>
